--- a/reports/karnataka-sir-2026-deck.pptx
+++ b/reports/karnataka-sir-2026-deck.pptx
@@ -2621,7 +2621,7 @@
           <a:p>
             <a:r>
               <a:rPr lang="en-US" dirty="0"/>
-              <a:t>Every figure is computed from the Chief Electoral Officer's district tables. Nothing has been published by assembly constituency, so there is no comparison with election margins. The final roll is due on 27 October 2026.</a:t>
+              <a:t>The Special Intensive Revision (SIR) is the Election Commission's house-to-house recheck of the electoral roll, the list of people entitled to vote. Every figure is computed from the Chief Electoral Officer's district tables. Nothing has been published by assembly constituency, so there is no comparison with election margins. The final roll is due on 27 October 2026.</a:t>
             </a:r>
             <a:endParaRPr lang="en-US" dirty="0"/>
           </a:p>
@@ -3149,7 +3149,7 @@
           <a:p>
             <a:r>
               <a:rPr lang="en-US" dirty="0"/>
-              <a:t/>
+              <a:t>The draft roll is the roll published after the house-to-house check. Per 100 electors is the number left off for every 100 people on the roll of 16 June, which lets districts of different size be compared. Electors kept on the draft can still be sent a notice to appear at a hearing, and those hearings were under way on 25 September.</a:t>
             </a:r>
             <a:endParaRPr lang="en-US" dirty="0"/>
           </a:p>
@@ -3413,7 +3413,7 @@
           <a:p>
             <a:r>
               <a:rPr lang="en-US" dirty="0"/>
-              <a:t/>
+              <a:t>A rank correlation runs from -1 to 1 and measures how far two orderings agree.</a:t>
             </a:r>
             <a:endParaRPr lang="en-US" dirty="0"/>
           </a:p>
@@ -16153,7 +16153,7 @@
       </p:graphicFrame>
       <p:sp>
         <p:nvSpPr>
-          <p:cNvPr id="48" name="Text 45"/>
+          <p:cNvPr id="49" name="Text 45"/>
           <p:cNvSpPr txBox="1"/>
           <p:nvPr/>
         </p:nvSpPr>

--- a/reports/karnataka-sir-2026-deck.pptx
+++ b/reports/karnataka-sir-2026-deck.pptx
@@ -1936,7 +1936,7 @@
               <c:strCache>
                 <c:ptCount val="1"/>
                 <c:pt idx="0">
-                  <c:v>On 25 September</c:v>
+                  <c:v>On 9 October</c:v>
                 </c:pt>
               </c:strCache>
             </c:strRef>
@@ -2025,40 +2025,40 @@
                 <c:formatCode>General</c:formatCode>
                 <c:ptCount val="12"/>
                 <c:pt idx="0">
-                  <c:v>49.33</c:v>
+                  <c:v>49.22</c:v>
                 </c:pt>
                 <c:pt idx="1">
-                  <c:v>45.47</c:v>
+                  <c:v>44.54</c:v>
                 </c:pt>
                 <c:pt idx="2">
-                  <c:v>45.09</c:v>
+                  <c:v>44.49</c:v>
                 </c:pt>
                 <c:pt idx="3">
-                  <c:v>42.71</c:v>
+                  <c:v>42.37</c:v>
                 </c:pt>
                 <c:pt idx="4">
-                  <c:v>21.8</c:v>
+                  <c:v>21.18</c:v>
                 </c:pt>
                 <c:pt idx="5">
-                  <c:v>19.72</c:v>
+                  <c:v>19.16</c:v>
                 </c:pt>
                 <c:pt idx="6">
-                  <c:v>17.91</c:v>
+                  <c:v>17.16</c:v>
                 </c:pt>
                 <c:pt idx="7">
-                  <c:v>17.5</c:v>
+                  <c:v>17.15</c:v>
                 </c:pt>
                 <c:pt idx="8">
-                  <c:v>17.89</c:v>
+                  <c:v>16.29</c:v>
                 </c:pt>
                 <c:pt idx="9">
-                  <c:v>16.32</c:v>
+                  <c:v>15.68</c:v>
                 </c:pt>
                 <c:pt idx="10">
-                  <c:v>16.22</c:v>
+                  <c:v>15.52</c:v>
                 </c:pt>
                 <c:pt idx="11">
-                  <c:v>14.61</c:v>
+                  <c:v>14.09</c:v>
                 </c:pt>
               </c:numCache>
             </c:numRef>
@@ -3149,7 +3149,7 @@
           <a:p>
             <a:r>
               <a:rPr lang="en-US" dirty="0"/>
-              <a:t>The draft roll is the roll published after the house-to-house check. Per 100 electors is the number left off for every 100 people on the roll of 16 June, which lets districts of different size be compared. Electors kept on the draft can still be sent a notice to appear at a hearing, and those hearings were under way on 25 September.</a:t>
+              <a:t>The draft roll is the roll published after the house-to-house check. Per 100 electors is the number left off for every 100 people on the roll of 16 June, which lets districts of different size be compared. Electors kept on the draft can still be sent a notice to appear at a hearing, and those hearings were under way on 9 October.</a:t>
             </a:r>
             <a:endParaRPr lang="en-US" dirty="0"/>
           </a:p>
@@ -4538,7 +4538,7 @@
                 <a:ea typeface="Cambria" pitchFamily="34" charset="-122"/>
                 <a:cs typeface="Cambria" pitchFamily="34" charset="-120"/>
               </a:rPr>
-              <a:t>1.9%</a:t>
+              <a:t>4.9%</a:t>
             </a:r>
             <a:endParaRPr lang="en-US" sz="3000" dirty="0"/>
           </a:p>
@@ -4579,7 +4579,7 @@
                 <a:ea typeface="Calibri" pitchFamily="34" charset="-122"/>
                 <a:cs typeface="Calibri" pitchFamily="34" charset="-120"/>
               </a:rPr>
-              <a:t>of the names removed back by 25 September</a:t>
+              <a:t>of the names removed back by 9 October</a:t>
             </a:r>
             <a:endParaRPr lang="en-US" sz="1250" dirty="0"/>
           </a:p>
@@ -6464,7 +6464,7 @@
                 <a:ea typeface="Calibri" pitchFamily="34" charset="-122"/>
                 <a:cs typeface="Calibri" pitchFamily="34" charset="-120"/>
               </a:rPr>
-              <a:t>How many names were left off the draft in each of the 34 election districts, on what recorded reason, and how the roll stood on 25 September.</a:t>
+              <a:t>How many names were left off the draft in each of the 34 election districts, on what recorded reason, and how the roll stood on 9 October.</a:t>
             </a:r>
             <a:endParaRPr lang="en-US" sz="1500" dirty="0"/>
           </a:p>
@@ -8737,7 +8737,7 @@
                 <a:ea typeface="Calibri" pitchFamily="34" charset="-122"/>
                 <a:cs typeface="Calibri" pitchFamily="34" charset="-120"/>
               </a:rPr>
-              <a:t>The roll of 25 September 2026, by district and sex, is from the press note of that date. The final roll is due on 27 October.</a:t>
+              <a:t>The roll of 9 October 2026, by district and sex, is from the press note of that date. The final roll is due on 27 October.</a:t>
             </a:r>
             <a:endParaRPr lang="en-US" sz="1600" dirty="0"/>
           </a:p>
@@ -11954,7 +11954,7 @@
                 <a:ea typeface="Calibri" pitchFamily="34" charset="-122"/>
                 <a:cs typeface="Calibri" pitchFamily="34" charset="-120"/>
               </a:rPr>
-              <a:t>By 25 September the roll had risen by 2,08,105 since the draft, 1.9% of the names removed. In Bengaluru it rose by 2,340.</a:t>
+              <a:t>By 9 October the roll had risen by 5,25,418 since the draft, 4.9% of the names removed. In Bengaluru it rose by 49,951.</a:t>
             </a:r>
             <a:endParaRPr lang="en-US" sz="1700" dirty="0"/>
           </a:p>
@@ -12142,7 +12142,7 @@
                 <a:ea typeface="Calibri" pitchFamily="34" charset="-122"/>
                 <a:cs typeface="Calibri" pitchFamily="34" charset="-120"/>
               </a:rPr>
-              <a:t>The state's roll, step by step, to 25 September 2026, while notices were still being heard</a:t>
+              <a:t>The state's roll, step by step, to 9 October 2026, while notices were still being heard</a:t>
             </a:r>
             <a:endParaRPr lang="en-US" sz="1400" dirty="0"/>
           </a:p>
@@ -13748,8 +13748,8 @@
         </p:nvSpPr>
         <p:spPr>
           <a:xfrm>
-            <a:off x="9362537" y="4070492"/>
-            <a:ext cx="862899" cy="31866"/>
+            <a:off x="9362537" y="4021904"/>
+            <a:ext cx="862899" cy="80453"/>
           </a:xfrm>
           <a:prstGeom prst="rect">
             <a:avLst/>
@@ -13768,7 +13768,7 @@
         </p:nvSpPr>
         <p:spPr>
           <a:xfrm>
-            <a:off x="9177630" y="3796172"/>
+            <a:off x="9177630" y="3747584"/>
             <a:ext cx="1232713" cy="256032"/>
           </a:xfrm>
           <a:prstGeom prst="rect">
@@ -13795,7 +13795,7 @@
                 <a:ea typeface="Calibri" pitchFamily="34" charset="-122"/>
                 <a:cs typeface="Calibri" pitchFamily="34" charset="-120"/>
               </a:rPr>
-              <a:t>+2,08,105</a:t>
+              <a:t>+5,25,418</a:t>
             </a:r>
             <a:endParaRPr lang="en-US" sz="1000" dirty="0"/>
           </a:p>
@@ -13850,8 +13850,8 @@
         </p:nvSpPr>
         <p:spPr>
           <a:xfrm>
-            <a:off x="10595249" y="4070492"/>
-            <a:ext cx="862899" cy="1507348"/>
+            <a:off x="10595249" y="4021904"/>
+            <a:ext cx="862899" cy="1555936"/>
           </a:xfrm>
           <a:prstGeom prst="rect">
             <a:avLst/>
@@ -13870,7 +13870,7 @@
         </p:nvSpPr>
         <p:spPr>
           <a:xfrm>
-            <a:off x="10410342" y="3796172"/>
+            <a:off x="10410342" y="3747584"/>
             <a:ext cx="1232713" cy="256032"/>
           </a:xfrm>
           <a:prstGeom prst="rect">
@@ -13897,7 +13897,7 @@
                 <a:ea typeface="Calibri" pitchFamily="34" charset="-122"/>
                 <a:cs typeface="Calibri" pitchFamily="34" charset="-120"/>
               </a:rPr>
-              <a:t>4,48,44,080</a:t>
+              <a:t>4,51,61,393</a:t>
             </a:r>
             <a:endParaRPr lang="en-US" sz="1000" dirty="0"/>
           </a:p>
@@ -13938,7 +13938,7 @@
                 <a:ea typeface="Calibri" pitchFamily="34" charset="-122"/>
                 <a:cs typeface="Calibri" pitchFamily="34" charset="-120"/>
               </a:rPr>
-              <a:t>Roll of 25 September</a:t>
+              <a:t>Roll of 9 October</a:t>
             </a:r>
             <a:endParaRPr lang="en-US" sz="1000" dirty="0"/>
           </a:p>
@@ -17735,7 +17735,7 @@
                 <a:ea typeface="Calibri" pitchFamily="34" charset="-122"/>
                 <a:cs typeface="Calibri" pitchFamily="34" charset="-120"/>
               </a:rPr>
-              <a:t>By 25 September Bengaluru's roll had risen by 2,340 since the draft, against 46.9 lakh names removed. In the rest of the state the rise came to 3.4% of the names removed.</a:t>
+              <a:t>By 9 October Bengaluru's roll had risen by 49,951 since the draft, against 46.9 lakh names removed. In the rest of the state the rise came to 7.8% of the names removed.</a:t>
             </a:r>
             <a:endParaRPr lang="en-US" sz="1600" dirty="0"/>
           </a:p>
@@ -18965,7 +18965,7 @@
                 <a:ea typeface="Calibri" pitchFamily="34" charset="-122"/>
                 <a:cs typeface="Calibri" pitchFamily="34" charset="-120"/>
               </a:rPr>
-              <a:t>women's share of the roll of 25 September</a:t>
+              <a:t>women's share of the roll of 9 October</a:t>
             </a:r>
             <a:endParaRPr lang="en-US" sz="1200" dirty="0"/>
           </a:p>
@@ -19114,7 +19114,7 @@
                 <a:ea typeface="Cambria" pitchFamily="34" charset="-122"/>
                 <a:cs typeface="Cambria" pitchFamily="34" charset="-120"/>
               </a:rPr>
-              <a:t>By 25 September only 1.9% of the names removed had come back, and 0.05% in Bengaluru</a:t>
+              <a:t>By 9 October only 4.9% of the names removed had come back, and 1.07% in Bengaluru</a:t>
             </a:r>
             <a:endParaRPr lang="en-US" sz="2700" dirty="0"/>
           </a:p>
@@ -19153,7 +19153,7 @@
                 <a:ea typeface="Calibri" pitchFamily="34" charset="-122"/>
                 <a:cs typeface="Calibri" pitchFamily="34" charset="-120"/>
               </a:rPr>
-              <a:t>Removed at the draft and the fall left on 25 September, per 100 electors, the twelve districts with the highest rates</a:t>
+              <a:t>Removed at the draft and the fall left on 9 October, per 100 electors, the twelve districts with the highest rates</a:t>
             </a:r>
             <a:endParaRPr lang="en-US" sz="1400" dirty="0"/>
           </a:p>
@@ -20092,7 +20092,7 @@
                 <a:ea typeface="Calibri" pitchFamily="34" charset="-122"/>
                 <a:cs typeface="Calibri" pitchFamily="34" charset="-120"/>
               </a:rPr>
-              <a:t>The roll rose by 2,08,105 after the draft, against 1.08 crore names removed.</a:t>
+              <a:t>The roll rose by 5,25,418 after the draft, against 1.08 crore names removed.</a:t>
             </a:r>
             <a:endParaRPr lang="en-US" sz="1400" dirty="0"/>
           </a:p>

--- a/reports/karnataka-sir-2026-deck.pptx
+++ b/reports/karnataka-sir-2026-deck.pptx
@@ -596,10 +596,10 @@
                     <c:v>Bagalkot</c:v>
                   </c:pt>
                   <c:pt idx="13">
-                    <c:v>Davangere</c:v>
+                    <c:v>Kodagu</c:v>
                   </c:pt>
                   <c:pt idx="14">
-                    <c:v>Kodagu</c:v>
+                    <c:v>Davangere</c:v>
                   </c:pt>
                   <c:pt idx="15">
                     <c:v>Gadag</c:v>
@@ -614,10 +614,10 @@
                     <c:v>Bangalore Rural</c:v>
                   </c:pt>
                   <c:pt idx="19">
-                    <c:v>Belgaum</c:v>
+                    <c:v>Koppal</c:v>
                   </c:pt>
                   <c:pt idx="20">
-                    <c:v>Koppal</c:v>
+                    <c:v>Belgaum</c:v>
                   </c:pt>
                   <c:pt idx="21">
                     <c:v>Shimoga</c:v>
@@ -669,106 +669,106 @@
                 <c:formatCode>General</c:formatCode>
                 <c:ptCount val="34"/>
                 <c:pt idx="0">
-                  <c:v>49.33</c:v>
+                  <c:v>49.3303</c:v>
                 </c:pt>
                 <c:pt idx="1">
-                  <c:v>45.54</c:v>
+                  <c:v>45.5429</c:v>
                 </c:pt>
                 <c:pt idx="2">
-                  <c:v>45.12</c:v>
+                  <c:v>45.1225</c:v>
                 </c:pt>
                 <c:pt idx="3">
-                  <c:v>42.71</c:v>
+                  <c:v>42.7108</c:v>
                 </c:pt>
                 <c:pt idx="4">
-                  <c:v>22.01</c:v>
+                  <c:v>22.0092</c:v>
                 </c:pt>
                 <c:pt idx="5">
-                  <c:v>19.9</c:v>
+                  <c:v>19.9036</c:v>
                 </c:pt>
                 <c:pt idx="6">
-                  <c:v>18.75</c:v>
+                  <c:v>18.7451</c:v>
                 </c:pt>
                 <c:pt idx="7">
-                  <c:v>18.16</c:v>
+                  <c:v>18.1589</c:v>
                 </c:pt>
                 <c:pt idx="8">
-                  <c:v>17.97</c:v>
+                  <c:v>17.9666</c:v>
                 </c:pt>
                 <c:pt idx="9">
-                  <c:v>16.52</c:v>
+                  <c:v>16.5241</c:v>
                 </c:pt>
                 <c:pt idx="10">
-                  <c:v>16.49</c:v>
+                  <c:v>16.4877</c:v>
                 </c:pt>
                 <c:pt idx="11">
-                  <c:v>14.99</c:v>
+                  <c:v>14.9914</c:v>
                 </c:pt>
                 <c:pt idx="12">
-                  <c:v>14.63</c:v>
+                  <c:v>14.6321</c:v>
                 </c:pt>
                 <c:pt idx="13">
-                  <c:v>13.41</c:v>
+                  <c:v>13.4115</c:v>
                 </c:pt>
                 <c:pt idx="14">
-                  <c:v>13.41</c:v>
+                  <c:v>13.4106</c:v>
                 </c:pt>
                 <c:pt idx="15">
-                  <c:v>13.37</c:v>
+                  <c:v>13.369</c:v>
                 </c:pt>
                 <c:pt idx="16">
-                  <c:v>13.2</c:v>
+                  <c:v>13.2046</c:v>
                 </c:pt>
                 <c:pt idx="17">
-                  <c:v>13</c:v>
+                  <c:v>13.0017</c:v>
                 </c:pt>
                 <c:pt idx="18">
-                  <c:v>12.79</c:v>
+                  <c:v>12.7915</c:v>
                 </c:pt>
                 <c:pt idx="19">
-                  <c:v>12.5</c:v>
+                  <c:v>12.5041</c:v>
                 </c:pt>
                 <c:pt idx="20">
-                  <c:v>12.5</c:v>
+                  <c:v>12.5016</c:v>
                 </c:pt>
                 <c:pt idx="21">
-                  <c:v>12.41</c:v>
+                  <c:v>12.4093</c:v>
                 </c:pt>
                 <c:pt idx="22">
-                  <c:v>11.78</c:v>
+                  <c:v>11.7782</c:v>
                 </c:pt>
                 <c:pt idx="23">
-                  <c:v>11.68</c:v>
+                  <c:v>11.6765</c:v>
                 </c:pt>
                 <c:pt idx="24">
-                  <c:v>10.84</c:v>
+                  <c:v>10.8429</c:v>
                 </c:pt>
                 <c:pt idx="25">
-                  <c:v>10.63</c:v>
+                  <c:v>10.6282</c:v>
                 </c:pt>
                 <c:pt idx="26">
-                  <c:v>10.31</c:v>
+                  <c:v>10.3134</c:v>
                 </c:pt>
                 <c:pt idx="27">
-                  <c:v>10.07</c:v>
+                  <c:v>10.0721</c:v>
                 </c:pt>
                 <c:pt idx="28">
-                  <c:v>10.03</c:v>
+                  <c:v>10.0287</c:v>
                 </c:pt>
                 <c:pt idx="29">
-                  <c:v>9.91</c:v>
+                  <c:v>9.9092</c:v>
                 </c:pt>
                 <c:pt idx="30">
-                  <c:v>8.73</c:v>
+                  <c:v>8.725</c:v>
                 </c:pt>
                 <c:pt idx="31">
-                  <c:v>8.7</c:v>
+                  <c:v>8.7001</c:v>
                 </c:pt>
                 <c:pt idx="32">
-                  <c:v>8.62</c:v>
+                  <c:v>8.6166</c:v>
                 </c:pt>
                 <c:pt idx="33">
-                  <c:v>5.95</c:v>
+                  <c:v>5.9529</c:v>
                 </c:pt>
               </c:numCache>
             </c:numRef>
@@ -1029,40 +1029,40 @@
                 <c:formatCode>General</c:formatCode>
                 <c:ptCount val="12"/>
                 <c:pt idx="0">
-                  <c:v>58.6</c:v>
+                  <c:v>58.5983</c:v>
                 </c:pt>
                 <c:pt idx="1">
-                  <c:v>67.33</c:v>
+                  <c:v>67.3267</c:v>
                 </c:pt>
                 <c:pt idx="2">
-                  <c:v>74.74</c:v>
+                  <c:v>74.7399</c:v>
                 </c:pt>
                 <c:pt idx="3">
-                  <c:v>75.02</c:v>
+                  <c:v>75.019</c:v>
                 </c:pt>
                 <c:pt idx="4">
-                  <c:v>66.6</c:v>
+                  <c:v>66.5967</c:v>
                 </c:pt>
                 <c:pt idx="5">
-                  <c:v>44.35</c:v>
+                  <c:v>44.3544</c:v>
                 </c:pt>
                 <c:pt idx="6">
-                  <c:v>58.48</c:v>
+                  <c:v>58.4765</c:v>
                 </c:pt>
                 <c:pt idx="7">
-                  <c:v>45.75</c:v>
+                  <c:v>45.7504</c:v>
                 </c:pt>
                 <c:pt idx="8">
-                  <c:v>61.79</c:v>
+                  <c:v>61.7948</c:v>
                 </c:pt>
                 <c:pt idx="9">
-                  <c:v>46.75</c:v>
+                  <c:v>46.7463</c:v>
                 </c:pt>
                 <c:pt idx="10">
-                  <c:v>66.92</c:v>
+                  <c:v>66.9213</c:v>
                 </c:pt>
                 <c:pt idx="11">
-                  <c:v>51.21</c:v>
+                  <c:v>51.2102</c:v>
                 </c:pt>
               </c:numCache>
             </c:numRef>
@@ -1166,40 +1166,40 @@
                 <c:formatCode>General</c:formatCode>
                 <c:ptCount val="12"/>
                 <c:pt idx="0">
-                  <c:v>25.19</c:v>
+                  <c:v>25.1933</c:v>
                 </c:pt>
                 <c:pt idx="1">
-                  <c:v>17.01</c:v>
+                  <c:v>17.0137</c:v>
                 </c:pt>
                 <c:pt idx="2">
-                  <c:v>10.11</c:v>
+                  <c:v>10.1064</c:v>
                 </c:pt>
                 <c:pt idx="3">
-                  <c:v>12.1</c:v>
+                  <c:v>12.1049</c:v>
                 </c:pt>
                 <c:pt idx="4">
-                  <c:v>9.09</c:v>
+                  <c:v>9.0898</c:v>
                 </c:pt>
                 <c:pt idx="5">
-                  <c:v>24.1</c:v>
+                  <c:v>24.0985</c:v>
                 </c:pt>
                 <c:pt idx="6">
-                  <c:v>9.56</c:v>
+                  <c:v>9.5623</c:v>
                 </c:pt>
                 <c:pt idx="7">
-                  <c:v>22.26</c:v>
+                  <c:v>22.2591</c:v>
                 </c:pt>
                 <c:pt idx="8">
-                  <c:v>9.15</c:v>
+                  <c:v>9.1454</c:v>
                 </c:pt>
                 <c:pt idx="9">
-                  <c:v>23.16</c:v>
+                  <c:v>23.1625</c:v>
                 </c:pt>
                 <c:pt idx="10">
-                  <c:v>8.68</c:v>
+                  <c:v>8.6752</c:v>
                 </c:pt>
                 <c:pt idx="11">
-                  <c:v>19.89</c:v>
+                  <c:v>19.8865</c:v>
                 </c:pt>
               </c:numCache>
             </c:numRef>
@@ -1303,40 +1303,40 @@
                 <c:formatCode>General</c:formatCode>
                 <c:ptCount val="12"/>
                 <c:pt idx="0">
-                  <c:v>6.56</c:v>
+                  <c:v>6.5639</c:v>
                 </c:pt>
                 <c:pt idx="1">
-                  <c:v>7.5</c:v>
+                  <c:v>7.5021</c:v>
                 </c:pt>
                 <c:pt idx="2">
-                  <c:v>7.67</c:v>
+                  <c:v>7.6726</c:v>
                 </c:pt>
                 <c:pt idx="3">
-                  <c:v>6.08</c:v>
+                  <c:v>6.0752</c:v>
                 </c:pt>
                 <c:pt idx="4">
-                  <c:v>13.74</c:v>
+                  <c:v>13.735</c:v>
                 </c:pt>
                 <c:pt idx="5">
-                  <c:v>20.49</c:v>
+                  <c:v>20.4917</c:v>
                 </c:pt>
                 <c:pt idx="6">
-                  <c:v>19.1</c:v>
+                  <c:v>19.0995</c:v>
                 </c:pt>
                 <c:pt idx="7">
-                  <c:v>18.44</c:v>
+                  <c:v>18.4361</c:v>
                 </c:pt>
                 <c:pt idx="8">
-                  <c:v>15.34</c:v>
+                  <c:v>15.3389</c:v>
                 </c:pt>
                 <c:pt idx="9">
-                  <c:v>19.7</c:v>
+                  <c:v>19.697</c:v>
                 </c:pt>
                 <c:pt idx="10">
-                  <c:v>13.26</c:v>
+                  <c:v>13.2595</c:v>
                 </c:pt>
                 <c:pt idx="11">
-                  <c:v>18.43</c:v>
+                  <c:v>18.4313</c:v>
                 </c:pt>
               </c:numCache>
             </c:numRef>
@@ -1440,40 +1440,40 @@
                 <c:formatCode>General</c:formatCode>
                 <c:ptCount val="12"/>
                 <c:pt idx="0">
-                  <c:v>1.03</c:v>
+                  <c:v>1.0339</c:v>
                 </c:pt>
                 <c:pt idx="1">
-                  <c:v>1.17</c:v>
+                  <c:v>1.1692</c:v>
                 </c:pt>
                 <c:pt idx="2">
-                  <c:v>1.5</c:v>
+                  <c:v>1.4979</c:v>
                 </c:pt>
                 <c:pt idx="3">
-                  <c:v>1.56</c:v>
+                  <c:v>1.5593</c:v>
                 </c:pt>
                 <c:pt idx="4">
-                  <c:v>6.4</c:v>
+                  <c:v>6.3988</c:v>
                 </c:pt>
                 <c:pt idx="5">
-                  <c:v>7.88</c:v>
+                  <c:v>7.8817</c:v>
                 </c:pt>
                 <c:pt idx="6">
-                  <c:v>12.75</c:v>
+                  <c:v>12.7481</c:v>
                 </c:pt>
                 <c:pt idx="7">
-                  <c:v>9.62</c:v>
+                  <c:v>9.6167</c:v>
                 </c:pt>
                 <c:pt idx="8">
-                  <c:v>11.89</c:v>
+                  <c:v>11.8939</c:v>
                 </c:pt>
                 <c:pt idx="9">
-                  <c:v>10.14</c:v>
+                  <c:v>10.1431</c:v>
                 </c:pt>
                 <c:pt idx="10">
-                  <c:v>7.1</c:v>
+                  <c:v>7.0996</c:v>
                 </c:pt>
                 <c:pt idx="11">
-                  <c:v>10.3</c:v>
+                  <c:v>10.2953</c:v>
                 </c:pt>
               </c:numCache>
             </c:numRef>
@@ -1577,40 +1577,40 @@
                 <c:formatCode>General</c:formatCode>
                 <c:ptCount val="12"/>
                 <c:pt idx="0">
-                  <c:v>8.61</c:v>
+                  <c:v>8.6106</c:v>
                 </c:pt>
                 <c:pt idx="1">
-                  <c:v>6.99</c:v>
+                  <c:v>6.9883</c:v>
                 </c:pt>
                 <c:pt idx="2">
-                  <c:v>5.98</c:v>
+                  <c:v>5.9833</c:v>
                 </c:pt>
                 <c:pt idx="3">
-                  <c:v>5.24</c:v>
+                  <c:v>5.2416</c:v>
                 </c:pt>
                 <c:pt idx="4">
-                  <c:v>4.18</c:v>
+                  <c:v>4.1797</c:v>
                 </c:pt>
                 <c:pt idx="5">
-                  <c:v>3.17</c:v>
+                  <c:v>3.1737</c:v>
                 </c:pt>
                 <c:pt idx="6">
-                  <c:v>0.11</c:v>
+                  <c:v>0.1136</c:v>
                 </c:pt>
                 <c:pt idx="7">
-                  <c:v>3.94</c:v>
+                  <c:v>3.9377</c:v>
                 </c:pt>
                 <c:pt idx="8">
-                  <c:v>1.83</c:v>
+                  <c:v>1.8269</c:v>
                 </c:pt>
                 <c:pt idx="9">
-                  <c:v>0.25</c:v>
+                  <c:v>0.2511</c:v>
                 </c:pt>
                 <c:pt idx="10">
-                  <c:v>4.04</c:v>
+                  <c:v>4.0445</c:v>
                 </c:pt>
                 <c:pt idx="11">
-                  <c:v>0.18</c:v>
+                  <c:v>0.1767</c:v>
                 </c:pt>
               </c:numCache>
             </c:numRef>
@@ -1888,40 +1888,40 @@
                 <c:formatCode>General</c:formatCode>
                 <c:ptCount val="12"/>
                 <c:pt idx="0">
-                  <c:v>49.33</c:v>
+                  <c:v>49.3303</c:v>
                 </c:pt>
                 <c:pt idx="1">
-                  <c:v>45.54</c:v>
+                  <c:v>45.5429</c:v>
                 </c:pt>
                 <c:pt idx="2">
-                  <c:v>45.12</c:v>
+                  <c:v>45.1225</c:v>
                 </c:pt>
                 <c:pt idx="3">
-                  <c:v>42.71</c:v>
+                  <c:v>42.7108</c:v>
                 </c:pt>
                 <c:pt idx="4">
-                  <c:v>22.01</c:v>
+                  <c:v>22.0092</c:v>
                 </c:pt>
                 <c:pt idx="5">
-                  <c:v>19.9</c:v>
+                  <c:v>19.9036</c:v>
                 </c:pt>
                 <c:pt idx="6">
-                  <c:v>18.75</c:v>
+                  <c:v>18.7451</c:v>
                 </c:pt>
                 <c:pt idx="7">
-                  <c:v>18.16</c:v>
+                  <c:v>18.1589</c:v>
                 </c:pt>
                 <c:pt idx="8">
-                  <c:v>17.97</c:v>
+                  <c:v>17.9666</c:v>
                 </c:pt>
                 <c:pt idx="9">
-                  <c:v>16.52</c:v>
+                  <c:v>16.5241</c:v>
                 </c:pt>
                 <c:pt idx="10">
-                  <c:v>16.49</c:v>
+                  <c:v>16.4877</c:v>
                 </c:pt>
                 <c:pt idx="11">
-                  <c:v>14.99</c:v>
+                  <c:v>14.9914</c:v>
                 </c:pt>
               </c:numCache>
             </c:numRef>
@@ -2025,40 +2025,40 @@
                 <c:formatCode>General</c:formatCode>
                 <c:ptCount val="12"/>
                 <c:pt idx="0">
-                  <c:v>49.22</c:v>
+                  <c:v>49.2195</c:v>
                 </c:pt>
                 <c:pt idx="1">
-                  <c:v>44.54</c:v>
+                  <c:v>44.5378</c:v>
                 </c:pt>
                 <c:pt idx="2">
-                  <c:v>44.49</c:v>
+                  <c:v>44.4866</c:v>
                 </c:pt>
                 <c:pt idx="3">
-                  <c:v>42.37</c:v>
+                  <c:v>42.3689</c:v>
                 </c:pt>
                 <c:pt idx="4">
-                  <c:v>21.18</c:v>
+                  <c:v>21.1787</c:v>
                 </c:pt>
                 <c:pt idx="5">
-                  <c:v>19.16</c:v>
+                  <c:v>19.162</c:v>
                 </c:pt>
                 <c:pt idx="6">
-                  <c:v>17.16</c:v>
+                  <c:v>17.1643</c:v>
                 </c:pt>
                 <c:pt idx="7">
-                  <c:v>17.15</c:v>
+                  <c:v>17.1463</c:v>
                 </c:pt>
                 <c:pt idx="8">
-                  <c:v>16.29</c:v>
+                  <c:v>16.2929</c:v>
                 </c:pt>
                 <c:pt idx="9">
-                  <c:v>15.68</c:v>
+                  <c:v>15.6756</c:v>
                 </c:pt>
                 <c:pt idx="10">
-                  <c:v>15.52</c:v>
+                  <c:v>15.5219</c:v>
                 </c:pt>
                 <c:pt idx="11">
-                  <c:v>14.09</c:v>
+                  <c:v>14.0893</c:v>
                 </c:pt>
               </c:numCache>
             </c:numRef>
@@ -18820,7 +18820,7 @@
                 <a:ea typeface="Cambria" pitchFamily="34" charset="-122"/>
                 <a:cs typeface="Cambria" pitchFamily="34" charset="-120"/>
               </a:rPr>
-              <a:t>50.4%</a:t>
+              <a:t>50.3%</a:t>
             </a:r>
             <a:endParaRPr lang="en-US" sz="2800" dirty="0"/>
           </a:p>

--- a/reports/karnataka-sir-2026-deck.pptx
+++ b/reports/karnataka-sir-2026-deck.pptx
@@ -4618,7 +4618,7 @@
                 <a:ea typeface="Calibri" pitchFamily="34" charset="-122"/>
                 <a:cs typeface="Calibri" pitchFamily="34" charset="-120"/>
               </a:rPr>
-              <a:t>PinPoint Ventures</a:t>
+              <a:t>ImpactMojo</a:t>
             </a:r>
             <a:endParaRPr lang="en-US" sz="1300" dirty="0"/>
           </a:p>
@@ -5562,7 +5562,7 @@
                 <a:ea typeface="Calibri" pitchFamily="34" charset="-122"/>
                 <a:cs typeface="Calibri" pitchFamily="34" charset="-120"/>
               </a:rPr>
-              <a:t>Karnataka SIR 2026 · PinPoint Ventures · totals only, never names or EPIC numbers</a:t>
+              <a:t>Karnataka SIR 2026 · ImpactMojo · totals only, never names or EPIC numbers</a:t>
             </a:r>
             <a:endParaRPr lang="en-US" sz="900" dirty="0"/>
           </a:p>
@@ -6715,7 +6715,7 @@
                 <a:ea typeface="Calibri" pitchFamily="34" charset="-122"/>
                 <a:cs typeface="Calibri" pitchFamily="34" charset="-120"/>
               </a:rPr>
-              <a:t>Karnataka SIR 2026 · PinPoint Ventures · totals only, never names or EPIC numbers</a:t>
+              <a:t>Karnataka SIR 2026 · ImpactMojo · totals only, never names or EPIC numbers</a:t>
             </a:r>
             <a:endParaRPr lang="en-US" sz="900" dirty="0"/>
           </a:p>
@@ -7832,7 +7832,7 @@
                 <a:ea typeface="Calibri" pitchFamily="34" charset="-122"/>
                 <a:cs typeface="Calibri" pitchFamily="34" charset="-120"/>
               </a:rPr>
-              <a:t>Karnataka SIR 2026 · PinPoint Ventures · totals only, never names or EPIC numbers</a:t>
+              <a:t>Karnataka SIR 2026 · ImpactMojo · totals only, never names or EPIC numbers</a:t>
             </a:r>
             <a:endParaRPr lang="en-US" sz="900" dirty="0"/>
           </a:p>
@@ -8912,7 +8912,7 @@
                 <a:ea typeface="Calibri" pitchFamily="34" charset="-122"/>
                 <a:cs typeface="Calibri" pitchFamily="34" charset="-120"/>
               </a:rPr>
-              <a:t>PinPoint Ventures</a:t>
+              <a:t>ImpactMojo</a:t>
             </a:r>
             <a:endParaRPr lang="en-US" sz="1700" dirty="0"/>
           </a:p>
@@ -11003,7 +11003,7 @@
                 <a:ea typeface="Calibri" pitchFamily="34" charset="-122"/>
                 <a:cs typeface="Calibri" pitchFamily="34" charset="-120"/>
               </a:rPr>
-              <a:t>Karnataka SIR 2026 · PinPoint Ventures · totals only, never names or EPIC numbers</a:t>
+              <a:t>Karnataka SIR 2026 · ImpactMojo · totals only, never names or EPIC numbers</a:t>
             </a:r>
             <a:endParaRPr lang="en-US" sz="900" dirty="0"/>
           </a:p>
@@ -12181,7 +12181,7 @@
                 <a:ea typeface="Calibri" pitchFamily="34" charset="-122"/>
                 <a:cs typeface="Calibri" pitchFamily="34" charset="-120"/>
               </a:rPr>
-              <a:t>Karnataka SIR 2026 · PinPoint Ventures · totals only, never names or EPIC numbers</a:t>
+              <a:t>Karnataka SIR 2026 · ImpactMojo · totals only, never names or EPIC numbers</a:t>
             </a:r>
             <a:endParaRPr lang="en-US" sz="900" dirty="0"/>
           </a:p>
@@ -14144,7 +14144,7 @@
                 <a:ea typeface="Calibri" pitchFamily="34" charset="-122"/>
                 <a:cs typeface="Calibri" pitchFamily="34" charset="-120"/>
               </a:rPr>
-              <a:t>Karnataka SIR 2026 · PinPoint Ventures · totals only, never names or EPIC numbers</a:t>
+              <a:t>Karnataka SIR 2026 · ImpactMojo · totals only, never names or EPIC numbers</a:t>
             </a:r>
             <a:endParaRPr lang="en-US" sz="900" dirty="0"/>
           </a:p>
@@ -15290,7 +15290,7 @@
                 <a:ea typeface="Calibri" pitchFamily="34" charset="-122"/>
                 <a:cs typeface="Calibri" pitchFamily="34" charset="-120"/>
               </a:rPr>
-              <a:t>Karnataka SIR 2026 · PinPoint Ventures · totals only, never names or EPIC numbers</a:t>
+              <a:t>Karnataka SIR 2026 · ImpactMojo · totals only, never names or EPIC numbers</a:t>
             </a:r>
             <a:endParaRPr lang="en-US" sz="900" dirty="0"/>
           </a:p>
@@ -16436,7 +16436,7 @@
                 <a:ea typeface="Calibri" pitchFamily="34" charset="-122"/>
                 <a:cs typeface="Calibri" pitchFamily="34" charset="-120"/>
               </a:rPr>
-              <a:t>Karnataka SIR 2026 · PinPoint Ventures · totals only, never names or EPIC numbers</a:t>
+              <a:t>Karnataka SIR 2026 · ImpactMojo · totals only, never names or EPIC numbers</a:t>
             </a:r>
             <a:endParaRPr lang="en-US" sz="900" dirty="0"/>
           </a:p>
@@ -17918,7 +17918,7 @@
                 <a:ea typeface="Calibri" pitchFamily="34" charset="-122"/>
                 <a:cs typeface="Calibri" pitchFamily="34" charset="-120"/>
               </a:rPr>
-              <a:t>Karnataka SIR 2026 · PinPoint Ventures · totals only, never names or EPIC numbers</a:t>
+              <a:t>Karnataka SIR 2026 · ImpactMojo · totals only, never names or EPIC numbers</a:t>
             </a:r>
             <a:endParaRPr lang="en-US" sz="900" dirty="0"/>
           </a:p>
@@ -19192,7 +19192,7 @@
                 <a:ea typeface="Calibri" pitchFamily="34" charset="-122"/>
                 <a:cs typeface="Calibri" pitchFamily="34" charset="-120"/>
               </a:rPr>
-              <a:t>Karnataka SIR 2026 · PinPoint Ventures · totals only, never names or EPIC numbers</a:t>
+              <a:t>Karnataka SIR 2026 · ImpactMojo · totals only, never names or EPIC numbers</a:t>
             </a:r>
             <a:endParaRPr lang="en-US" sz="900" dirty="0"/>
           </a:p>

--- a/reports/karnataka-sir-2026-deck.pptx
+++ b/reports/karnataka-sir-2026-deck.pptx
@@ -4475,7 +4475,7 @@
                 <a:ea typeface="Calibri" pitchFamily="34" charset="-122"/>
                 <a:cs typeface="Calibri" pitchFamily="34" charset="-120"/>
               </a:rPr>
-              <a:t>of the names removed were in Bengaluru</a:t>
+              <a:t>of the names left off were in Bengaluru</a:t>
             </a:r>
             <a:endParaRPr lang="en-US" sz="1250" dirty="0"/>
           </a:p>
@@ -4579,7 +4579,7 @@
                 <a:ea typeface="Calibri" pitchFamily="34" charset="-122"/>
                 <a:cs typeface="Calibri" pitchFamily="34" charset="-120"/>
               </a:rPr>
-              <a:t>of the names removed back by 9 October</a:t>
+              <a:t>of the names left off back by 9 October</a:t>
             </a:r>
             <a:endParaRPr lang="en-US" sz="1250" dirty="0"/>
           </a:p>
@@ -6527,7 +6527,7 @@
                 <a:ea typeface="Calibri" pitchFamily="34" charset="-122"/>
                 <a:cs typeface="Calibri" pitchFamily="34" charset="-120"/>
               </a:rPr>
-              <a:t>Which constituencies lost the most names, or how the removals compare with the 2023 margins, because nothing was published by constituency. Whether women, the old or the young were removed more often.</a:t>
+              <a:t>Which constituencies lost the most names, or how the names left off compare with the 2023 margins, because nothing was published by constituency. Whether women, the old or the young were left off more often.</a:t>
             </a:r>
             <a:endParaRPr lang="en-US" sz="1500" dirty="0"/>
           </a:p>
@@ -6571,7 +6571,7 @@
                 <a:ea typeface="Calibri" pitchFamily="34" charset="-122"/>
                 <a:cs typeface="Calibri" pitchFamily="34" charset="-120"/>
               </a:rPr>
-              <a:t>A reason on the list is what the officer wrote down, and nobody checked it. The tables show where names were removed and cannot show why.</a:t>
+              <a:t>A reason on the list is what the officer wrote down, and nobody checked it. The tables show where names were left off and cannot show why.</a:t>
             </a:r>
             <a:endParaRPr lang="en-US" sz="1600" dirty="0"/>
           </a:p>
@@ -7600,7 +7600,7 @@
                 <a:ea typeface="Calibri" pitchFamily="34" charset="-122"/>
                 <a:cs typeface="Calibri" pitchFamily="34" charset="-120"/>
               </a:rPr>
-              <a:t>Publish the names removed by assembly constituency and polling station, with the reason.</a:t>
+              <a:t>Publish the names left off by assembly constituency and polling station, with the reason.</a:t>
             </a:r>
             <a:endParaRPr lang="en-US" sz="1700" dirty="0"/>
           </a:p>
@@ -7622,7 +7622,7 @@
                 <a:ea typeface="Calibri" pitchFamily="34" charset="-122"/>
                 <a:cs typeface="Calibri" pitchFamily="34" charset="-120"/>
               </a:rPr>
-              <a:t>Publish the names removed by sex and age, with the roll of 16 June by sex.</a:t>
+              <a:t>Publish the names left off by sex and age, with the roll of 16 June by sex.</a:t>
             </a:r>
             <a:endParaRPr lang="en-US" sz="1700" dirty="0"/>
           </a:p>
@@ -10925,7 +10925,7 @@
                 <a:ea typeface="Cambria" pitchFamily="34" charset="-122"/>
                 <a:cs typeface="Cambria" pitchFamily="34" charset="-120"/>
               </a:rPr>
-              <a:t>The revision removed 19.5 of every 100 electors, and 45.1 in Bengaluru</a:t>
+              <a:t>The revision left 19.5 of every 100 electors off the draft, and 45.1 in Bengaluru</a:t>
             </a:r>
             <a:endParaRPr lang="en-US" sz="2700" dirty="0"/>
           </a:p>
@@ -11910,7 +11910,7 @@
                 <a:ea typeface="Calibri" pitchFamily="34" charset="-122"/>
                 <a:cs typeface="Calibri" pitchFamily="34" charset="-120"/>
               </a:rPr>
-              <a:t>Bengaluru's four districts lost 45.1 of every 100 electors. They hold 18.7% of the roll and 43.4% of the names removed.</a:t>
+              <a:t>Bengaluru's four districts lost 45.1 of every 100 electors. They hold 18.7% of the roll and 43.4% of the names left off the draft.</a:t>
             </a:r>
             <a:endParaRPr lang="en-US" sz="1700" dirty="0"/>
           </a:p>
@@ -11954,7 +11954,7 @@
                 <a:ea typeface="Calibri" pitchFamily="34" charset="-122"/>
                 <a:cs typeface="Calibri" pitchFamily="34" charset="-120"/>
               </a:rPr>
-              <a:t>By 9 October the roll had risen by 5,25,418 since the draft, 4.9% of the names removed. In Bengaluru it rose by 49,951.</a:t>
+              <a:t>By 9 October the roll had risen by 5,25,418 since the draft, 4.9% of the names left off. In Bengaluru it rose by 49,951.</a:t>
             </a:r>
             <a:endParaRPr lang="en-US" sz="1700" dirty="0"/>
           </a:p>
@@ -15251,7 +15251,7 @@
                 <a:ea typeface="Calibri" pitchFamily="34" charset="-122"/>
                 <a:cs typeface="Calibri" pitchFamily="34" charset="-120"/>
               </a:rPr>
-              <a:t>Share of each district's removals by the reason entered, the twelve districts with the highest rates</a:t>
+              <a:t>Share of each district's names left off, by the reason entered, the twelve districts with the highest rates</a:t>
             </a:r>
             <a:endParaRPr lang="en-US" sz="1400" dirty="0"/>
           </a:p>
@@ -16211,7 +16211,7 @@
                 <a:ea typeface="Calibri" pitchFamily="34" charset="-122"/>
                 <a:cs typeface="Calibri" pitchFamily="34" charset="-120"/>
               </a:rPr>
-              <a:t>The more names a district removed, the larger the share marked shifted or absent (rank correlation 0.81).</a:t>
+              <a:t>The more names a district lost, the larger the share marked shifted or absent (rank correlation 0.81).</a:t>
             </a:r>
             <a:endParaRPr lang="en-US" sz="1300" dirty="0"/>
           </a:p>
@@ -16358,7 +16358,7 @@
                 <a:ea typeface="Cambria" pitchFamily="34" charset="-122"/>
                 <a:cs typeface="Cambria" pitchFamily="34" charset="-120"/>
               </a:rPr>
-              <a:t>Bengaluru holds 18.7% of Karnataka's roll and 43.4% of the names removed</a:t>
+              <a:t>Bengaluru holds 18.7% of Karnataka's roll and 43.4% of the names left off the draft</a:t>
             </a:r>
             <a:endParaRPr lang="en-US" sz="2700" dirty="0"/>
           </a:p>
@@ -17379,7 +17379,7 @@
                 <a:ea typeface="Calibri" pitchFamily="34" charset="-122"/>
                 <a:cs typeface="Calibri" pitchFamily="34" charset="-120"/>
               </a:rPr>
-              <a:t>names removed in Bengaluru</a:t>
+              <a:t>names left off in Bengaluru</a:t>
             </a:r>
             <a:endParaRPr lang="en-US" sz="1200" dirty="0"/>
           </a:p>
@@ -17735,7 +17735,7 @@
                 <a:ea typeface="Calibri" pitchFamily="34" charset="-122"/>
                 <a:cs typeface="Calibri" pitchFamily="34" charset="-120"/>
               </a:rPr>
-              <a:t>By 9 October Bengaluru's roll had risen by 49,951 since the draft, against 46.9 lakh names removed. In the rest of the state the rise came to 7.8% of the names removed.</a:t>
+              <a:t>By 9 October Bengaluru's roll had risen by 49,951 since the draft, against 46.9 lakh names left off. In the rest of the state the rise came to 7.8% of the names left off the draft.</a:t>
             </a:r>
             <a:endParaRPr lang="en-US" sz="1600" dirty="0"/>
           </a:p>
@@ -17840,7 +17840,7 @@
                 <a:ea typeface="Cambria" pitchFamily="34" charset="-122"/>
                 <a:cs typeface="Cambria" pitchFamily="34" charset="-120"/>
               </a:rPr>
-              <a:t>Women's share of the removals cannot be counted, because the roll of 16 June has no count by sex</a:t>
+              <a:t>Women's share of the names left off cannot be counted, because the roll of 16 June has no count by sex</a:t>
             </a:r>
             <a:endParaRPr lang="en-US" sz="2700" dirty="0"/>
           </a:p>
@@ -19114,7 +19114,7 @@
                 <a:ea typeface="Cambria" pitchFamily="34" charset="-122"/>
                 <a:cs typeface="Cambria" pitchFamily="34" charset="-120"/>
               </a:rPr>
-              <a:t>By 9 October only 4.9% of the names removed had come back, and 1.07% in Bengaluru</a:t>
+              <a:t>By 9 October only 4.9% of the names left off had come back, and 1.07% in Bengaluru</a:t>
             </a:r>
             <a:endParaRPr lang="en-US" sz="2700" dirty="0"/>
           </a:p>
@@ -19153,7 +19153,7 @@
                 <a:ea typeface="Calibri" pitchFamily="34" charset="-122"/>
                 <a:cs typeface="Calibri" pitchFamily="34" charset="-120"/>
               </a:rPr>
-              <a:t>Removed at the draft and the fall left on 9 October, per 100 electors, the twelve districts with the highest rates</a:t>
+              <a:t>Left off at the draft and the fall left on 9 October, per 100 electors, the twelve districts with the highest rates</a:t>
             </a:r>
             <a:endParaRPr lang="en-US" sz="1400" dirty="0"/>
           </a:p>
@@ -20092,7 +20092,7 @@
                 <a:ea typeface="Calibri" pitchFamily="34" charset="-122"/>
                 <a:cs typeface="Calibri" pitchFamily="34" charset="-120"/>
               </a:rPr>
-              <a:t>The roll rose by 5,25,418 after the draft, against 1.08 crore names removed.</a:t>
+              <a:t>The roll rose by 5,25,418 after the draft, against 1.08 crore names left off.</a:t>
             </a:r>
             <a:endParaRPr lang="en-US" sz="1400" dirty="0"/>
           </a:p>

--- a/reports/karnataka-sir-2026-deck.pptx
+++ b/reports/karnataka-sir-2026-deck.pptx
@@ -2621,7 +2621,7 @@
           <a:p>
             <a:r>
               <a:rPr lang="en-US" dirty="0"/>
-              <a:t>The Special Intensive Revision (SIR) is the Election Commission's house-to-house recheck of the electoral roll, the list of people entitled to vote. Every figure is computed from the Chief Electoral Officer's district tables. Nothing has been published by assembly constituency, so there is no comparison with election margins. The final roll is due on 27 October 2026.</a:t>
+              <a:t>The Special Intensive Revision (SIR) is the Election Commission's house-to-house recheck of the electoral roll, the list of people entitled to vote. Every figure is computed from the Chief Electoral Officer's district tables. Nothing has been published by assembly constituency, so there is no comparison with election margins. The final roll of 27 October 2026 was reported for the state only.</a:t>
             </a:r>
             <a:endParaRPr lang="en-US" dirty="0"/>
           </a:p>
@@ -3149,7 +3149,7 @@
           <a:p>
             <a:r>
               <a:rPr lang="en-US" dirty="0"/>
-              <a:t>The draft roll is the roll published after the house-to-house check. Per 100 electors is the number left off for every 100 people on the roll of 16 June, which lets districts of different size be compared. Electors kept on the draft can still be sent a notice to appear at a hearing, and those hearings were under way on 9 October.</a:t>
+              <a:t>The draft roll is the roll published after the house-to-house check. Per 100 electors is the number left off for every 100 people on the roll of 16 June, which lets districts of different size be compared. Electors kept on the draft can still be sent a notice to appear at a hearing, and those hearings were to be decided by 22 October, before the final roll of 27 October.</a:t>
             </a:r>
             <a:endParaRPr lang="en-US" dirty="0"/>
           </a:p>
@@ -3237,7 +3237,7 @@
           <a:p>
             <a:r>
               <a:rPr lang="en-US" dirty="0"/>
-              <a:t>The bars start above zero so that the changes can be seen. The final roll is due on 27 October 2026. A reason on the list is what the officer wrote down, and nobody checked it.</a:t>
+              <a:t>The bars start above zero so that the changes can be seen. No count of names added or deleted after the draft was published, so the last step is the net change. A reason on the list is what the officer wrote down, and nobody checked it.</a:t>
             </a:r>
             <a:endParaRPr lang="en-US" dirty="0"/>
           </a:p>
@@ -4163,7 +4163,7 @@
                 <a:ea typeface="Calibri" pitchFamily="34" charset="-122"/>
                 <a:cs typeface="Calibri" pitchFamily="34" charset="-120"/>
               </a:rPr>
-              <a:t>District by district, on what recorded reason, and how the roll stood while notices were still being heard</a:t>
+              <a:t>District by district, on what recorded reason, and the final roll of 27 October 2026</a:t>
             </a:r>
             <a:endParaRPr lang="en-US" sz="1700" dirty="0"/>
           </a:p>
@@ -4538,7 +4538,7 @@
                 <a:ea typeface="Cambria" pitchFamily="34" charset="-122"/>
                 <a:cs typeface="Cambria" pitchFamily="34" charset="-120"/>
               </a:rPr>
-              <a:t>4.9%</a:t>
+              <a:t>8.0%</a:t>
             </a:r>
             <a:endParaRPr lang="en-US" sz="3000" dirty="0"/>
           </a:p>
@@ -4579,7 +4579,7 @@
                 <a:ea typeface="Calibri" pitchFamily="34" charset="-122"/>
                 <a:cs typeface="Calibri" pitchFamily="34" charset="-120"/>
               </a:rPr>
-              <a:t>of the names left off back by 9 October</a:t>
+              <a:t>of the names left off back by the final roll</a:t>
             </a:r>
             <a:endParaRPr lang="en-US" sz="1250" dirty="0"/>
           </a:p>
@@ -6676,7 +6676,7 @@
                 <a:ea typeface="Cambria" pitchFamily="34" charset="-122"/>
                 <a:cs typeface="Cambria" pitchFamily="34" charset="-120"/>
               </a:rPr>
-              <a:t>Publish the revision by constituency and by sex before the final roll</a:t>
+              <a:t>Publish the revision by constituency and by sex</a:t>
             </a:r>
             <a:endParaRPr lang="en-US" sz="2700" dirty="0"/>
           </a:p>
@@ -7688,7 +7688,7 @@
                 <a:ea typeface="Calibri" pitchFamily="34" charset="-122"/>
                 <a:cs typeface="Calibri" pitchFamily="34" charset="-120"/>
               </a:rPr>
-              <a:t>Publish with the final roll how many of those added had been left off the draft.</a:t>
+              <a:t>Publish how many names were added and deleted after the draft, and how many of those added had been left off it.</a:t>
             </a:r>
             <a:endParaRPr lang="en-US" sz="1700" dirty="0"/>
           </a:p>
@@ -8737,7 +8737,7 @@
                 <a:ea typeface="Calibri" pitchFamily="34" charset="-122"/>
                 <a:cs typeface="Calibri" pitchFamily="34" charset="-120"/>
               </a:rPr>
-              <a:t>The roll of 9 October 2026, by district and sex, is from the press note of that date. The final roll is due on 27 October.</a:t>
+              <a:t>The roll of 9 October 2026, by district and sex, is from the press note of that date. The final roll of 27 October 2026, for the state only, is from The Hindu's and ETV Bharat's reports of the Chief Electoral Officer's figures.</a:t>
             </a:r>
             <a:endParaRPr lang="en-US" sz="1600" dirty="0"/>
           </a:p>
@@ -11954,7 +11954,7 @@
                 <a:ea typeface="Calibri" pitchFamily="34" charset="-122"/>
                 <a:cs typeface="Calibri" pitchFamily="34" charset="-120"/>
               </a:rPr>
-              <a:t>By 9 October the roll had risen by 5,25,418 since the draft, 4.9% of the names left off. In Bengaluru it rose by 49,951.</a:t>
+              <a:t>The final roll of 27 October 2026 has 4,55,00,011 electors, 8,64,036 more than the draft, which is 8.0% of the names left off.</a:t>
             </a:r>
             <a:endParaRPr lang="en-US" sz="1700" dirty="0"/>
           </a:p>
@@ -12142,7 +12142,7 @@
                 <a:ea typeface="Calibri" pitchFamily="34" charset="-122"/>
                 <a:cs typeface="Calibri" pitchFamily="34" charset="-120"/>
               </a:rPr>
-              <a:t>The state's roll, step by step, to 9 October 2026, while notices were still being heard</a:t>
+              <a:t>The state's roll, step by step, to the final roll of 27 October 2026</a:t>
             </a:r>
             <a:endParaRPr lang="en-US" sz="1400" dirty="0"/>
           </a:p>
@@ -13748,8 +13748,8 @@
         </p:nvSpPr>
         <p:spPr>
           <a:xfrm>
-            <a:off x="9362537" y="4021904"/>
-            <a:ext cx="862899" cy="80453"/>
+            <a:off x="9362537" y="3970054"/>
+            <a:ext cx="862899" cy="132303"/>
           </a:xfrm>
           <a:prstGeom prst="rect">
             <a:avLst/>
@@ -13768,7 +13768,7 @@
         </p:nvSpPr>
         <p:spPr>
           <a:xfrm>
-            <a:off x="9177630" y="3747584"/>
+            <a:off x="9177630" y="3695734"/>
             <a:ext cx="1232713" cy="256032"/>
           </a:xfrm>
           <a:prstGeom prst="rect">
@@ -13795,7 +13795,7 @@
                 <a:ea typeface="Calibri" pitchFamily="34" charset="-122"/>
                 <a:cs typeface="Calibri" pitchFamily="34" charset="-120"/>
               </a:rPr>
-              <a:t>+5,25,418</a:t>
+              <a:t>+8,64,036</a:t>
             </a:r>
             <a:endParaRPr lang="en-US" sz="1000" dirty="0"/>
           </a:p>
@@ -13850,8 +13850,8 @@
         </p:nvSpPr>
         <p:spPr>
           <a:xfrm>
-            <a:off x="10595249" y="4021904"/>
-            <a:ext cx="862899" cy="1555936"/>
+            <a:off x="10595249" y="3970054"/>
+            <a:ext cx="862899" cy="1607786"/>
           </a:xfrm>
           <a:prstGeom prst="rect">
             <a:avLst/>
@@ -13870,7 +13870,7 @@
         </p:nvSpPr>
         <p:spPr>
           <a:xfrm>
-            <a:off x="10410342" y="3747584"/>
+            <a:off x="10410342" y="3695734"/>
             <a:ext cx="1232713" cy="256032"/>
           </a:xfrm>
           <a:prstGeom prst="rect">
@@ -13897,7 +13897,7 @@
                 <a:ea typeface="Calibri" pitchFamily="34" charset="-122"/>
                 <a:cs typeface="Calibri" pitchFamily="34" charset="-120"/>
               </a:rPr>
-              <a:t>4,51,61,393</a:t>
+              <a:t>4,55,00,011</a:t>
             </a:r>
             <a:endParaRPr lang="en-US" sz="1000" dirty="0"/>
           </a:p>
@@ -13938,7 +13938,7 @@
                 <a:ea typeface="Calibri" pitchFamily="34" charset="-122"/>
                 <a:cs typeface="Calibri" pitchFamily="34" charset="-120"/>
               </a:rPr>
-              <a:t>Roll of 9 October</a:t>
+              <a:t>Final roll</a:t>
             </a:r>
             <a:endParaRPr lang="en-US" sz="1000" dirty="0"/>
           </a:p>
@@ -18772,7 +18772,7 @@
         <p:spPr>
           <a:xfrm>
             <a:off x="548640" y="1920240"/>
-            <a:ext cx="5432908" cy="1645920"/>
+            <a:ext cx="3545738" cy="1645920"/>
           </a:xfrm>
           <a:prstGeom prst="roundRect">
             <a:avLst>
@@ -18794,7 +18794,7 @@
         <p:spPr>
           <a:xfrm>
             <a:off x="731520" y="2029968"/>
-            <a:ext cx="5067148" cy="790042"/>
+            <a:ext cx="3179978" cy="790042"/>
           </a:xfrm>
           <a:prstGeom prst="rect">
             <a:avLst/>
@@ -18835,7 +18835,7 @@
         <p:spPr>
           <a:xfrm>
             <a:off x="731520" y="2838298"/>
-            <a:ext cx="5067148" cy="636422"/>
+            <a:ext cx="3179978" cy="636422"/>
           </a:xfrm>
           <a:prstGeom prst="rect">
             <a:avLst/>
@@ -18875,8 +18875,8 @@
         </p:nvSpPr>
         <p:spPr>
           <a:xfrm>
-            <a:off x="6210148" y="1920240"/>
-            <a:ext cx="5432908" cy="1645920"/>
+            <a:off x="4322978" y="1920240"/>
+            <a:ext cx="3545738" cy="1645920"/>
           </a:xfrm>
           <a:prstGeom prst="roundRect">
             <a:avLst>
@@ -18897,8 +18897,8 @@
         </p:nvSpPr>
         <p:spPr>
           <a:xfrm>
-            <a:off x="6393028" y="2029968"/>
-            <a:ext cx="5067148" cy="790042"/>
+            <a:off x="4505858" y="2029968"/>
+            <a:ext cx="3179978" cy="790042"/>
           </a:xfrm>
           <a:prstGeom prst="rect">
             <a:avLst/>
@@ -18938,8 +18938,8 @@
         </p:nvSpPr>
         <p:spPr>
           <a:xfrm>
-            <a:off x="6393028" y="2838298"/>
-            <a:ext cx="5067148" cy="636422"/>
+            <a:off x="4505858" y="2838298"/>
+            <a:ext cx="3179978" cy="636422"/>
           </a:xfrm>
           <a:prstGeom prst="rect">
             <a:avLst/>
@@ -18973,7 +18973,111 @@
       </p:sp>
       <p:sp>
         <p:nvSpPr>
-          <p:cNvPr id="53" name="Text 51"/>
+          <p:cNvPr id="53" name="Shape 51"/>
+          <p:cNvSpPr/>
+          <p:nvPr/>
+        </p:nvSpPr>
+        <p:spPr>
+          <a:xfrm>
+            <a:off x="8097317" y="1920240"/>
+            <a:ext cx="3545738" cy="1645920"/>
+          </a:xfrm>
+          <a:prstGeom prst="roundRect">
+            <a:avLst>
+              <a:gd name="adj" fmla="val 4444"/>
+            </a:avLst>
+          </a:prstGeom>
+          <a:solidFill>
+            <a:srgbClr val="F4F6F7"/>
+          </a:solidFill>
+          <a:ln/>
+        </p:spPr>
+      </p:sp>
+      <p:sp>
+        <p:nvSpPr>
+          <p:cNvPr id="54" name="Text 52"/>
+          <p:cNvSpPr txBox="1"/>
+          <p:nvPr/>
+        </p:nvSpPr>
+        <p:spPr>
+          <a:xfrm>
+            <a:off x="8280197" y="2029968"/>
+            <a:ext cx="3179978" cy="790042"/>
+          </a:xfrm>
+          <a:prstGeom prst="rect">
+            <a:avLst/>
+          </a:prstGeom>
+          <a:noFill/>
+          <a:ln/>
+        </p:spPr>
+        <p:txBody>
+          <a:bodyPr wrap="square" lIns="0" tIns="0" rIns="0" bIns="0" rtlCol="0" anchor="b">
+            <a:normAutofit/>
+          </a:bodyPr>
+          <a:lstStyle/>
+          <a:p>
+            <a:pPr indent="0" marL="0">
+              <a:buNone/>
+            </a:pPr>
+            <a:r>
+              <a:rPr lang="en-US" sz="2800" b="1" dirty="0">
+                <a:solidFill>
+                  <a:srgbClr val="1E6B52"/>
+                </a:solidFill>
+                <a:latin typeface="Cambria" pitchFamily="34" charset="0"/>
+                <a:ea typeface="Cambria" pitchFamily="34" charset="-122"/>
+                <a:cs typeface="Cambria" pitchFamily="34" charset="-120"/>
+              </a:rPr>
+              <a:t>50.4%</a:t>
+            </a:r>
+            <a:endParaRPr lang="en-US" sz="2800" dirty="0"/>
+          </a:p>
+        </p:txBody>
+      </p:sp>
+      <p:sp>
+        <p:nvSpPr>
+          <p:cNvPr id="55" name="Text 53"/>
+          <p:cNvSpPr txBox="1"/>
+          <p:nvPr/>
+        </p:nvSpPr>
+        <p:spPr>
+          <a:xfrm>
+            <a:off x="8280197" y="2838298"/>
+            <a:ext cx="3179978" cy="636422"/>
+          </a:xfrm>
+          <a:prstGeom prst="rect">
+            <a:avLst/>
+          </a:prstGeom>
+          <a:noFill/>
+          <a:ln/>
+        </p:spPr>
+        <p:txBody>
+          <a:bodyPr wrap="square" lIns="0" tIns="0" rIns="0" bIns="0" rtlCol="0" anchor="t">
+            <a:normAutofit/>
+          </a:bodyPr>
+          <a:lstStyle/>
+          <a:p>
+            <a:pPr indent="0" marL="0">
+              <a:buNone/>
+            </a:pPr>
+            <a:r>
+              <a:rPr lang="en-US" sz="1200" dirty="0">
+                <a:solidFill>
+                  <a:srgbClr val="4D5B69"/>
+                </a:solidFill>
+                <a:latin typeface="Calibri" pitchFamily="34" charset="0"/>
+                <a:ea typeface="Calibri" pitchFamily="34" charset="-122"/>
+                <a:cs typeface="Calibri" pitchFamily="34" charset="-120"/>
+              </a:rPr>
+              <a:t>women's share of the final roll</a:t>
+            </a:r>
+            <a:endParaRPr lang="en-US" sz="1200" dirty="0"/>
+          </a:p>
+        </p:txBody>
+      </p:sp>
+      <p:sp>
+        <p:nvSpPr>
+          <p:cNvPr id="56" name="Text 54"/>
           <p:cNvSpPr txBox="1"/>
           <p:nvPr/>
         </p:nvSpPr>
@@ -19009,7 +19113,7 @@
                 <a:ea typeface="Calibri" pitchFamily="34" charset="-122"/>
                 <a:cs typeface="Calibri" pitchFamily="34" charset="-120"/>
               </a:rPr>
-              <a:t>The names left off are not split by sex. These two figures cannot show whether women were left off more often than men.</a:t>
+              <a:t>The names left off are not split by sex. These figures cannot show whether women were left off more often than men.</a:t>
             </a:r>
             <a:endParaRPr lang="en-US" sz="1600" dirty="0"/>
           </a:p>
@@ -20134,7 +20238,7 @@
                 <a:ea typeface="Calibri" pitchFamily="34" charset="-122"/>
                 <a:cs typeface="Calibri" pitchFamily="34" charset="-120"/>
               </a:rPr>
-              <a:t>The final roll is due on 27 October 2026 and may change this.</a:t>
+              <a:t>By the final roll of 27 October the state's roll was 8,64,036 above the draft. No district figures were given for it.</a:t>
             </a:r>
             <a:endParaRPr lang="en-US" sz="1400" dirty="0"/>
           </a:p>
